--- a/docs/slides/DMIT2008-Week4-Day2-Material-UI-CSS.pptx
+++ b/docs/slides/DMIT2008-Week4-Day2-Material-UI-CSS.pptx
@@ -279,6 +279,11 @@
       </a:defRPr>
     </a:lvl9pPr>
   </p:defaultTextStyle>
+  <p:extLst>
+    <p:ext uri="{EFAFB233-063F-42B5-8137-9DF3F51BA10A}">
+      <p15:sldGuideLst xmlns:p15="http://schemas.microsoft.com/office/powerpoint/2012/main"/>
+    </p:ext>
+  </p:extLst>
 </p:presentation>
 </file>
 
@@ -856,7 +861,7 @@
         </p:nvSpPr>
         <p:spPr>
           <a:xfrm>
-            <a:off x="381300" y="685800"/>
+            <a:off x="381000" y="685800"/>
             <a:ext cx="6096000" cy="3429000"/>
           </a:xfrm>
           <a:custGeom>
@@ -960,7 +965,7 @@
         </p:nvSpPr>
         <p:spPr>
           <a:xfrm>
-            <a:off x="381300" y="685800"/>
+            <a:off x="381000" y="685800"/>
             <a:ext cx="6096000" cy="3429000"/>
           </a:xfrm>
           <a:custGeom>
@@ -1064,7 +1069,7 @@
         </p:nvSpPr>
         <p:spPr>
           <a:xfrm>
-            <a:off x="381300" y="685800"/>
+            <a:off x="381000" y="685800"/>
             <a:ext cx="6096000" cy="3429000"/>
           </a:xfrm>
           <a:custGeom>
@@ -1168,7 +1173,7 @@
         </p:nvSpPr>
         <p:spPr>
           <a:xfrm>
-            <a:off x="381300" y="685800"/>
+            <a:off x="381000" y="685800"/>
             <a:ext cx="6096000" cy="3429000"/>
           </a:xfrm>
           <a:custGeom>
@@ -1272,7 +1277,7 @@
         </p:nvSpPr>
         <p:spPr>
           <a:xfrm>
-            <a:off x="381300" y="685800"/>
+            <a:off x="381000" y="685800"/>
             <a:ext cx="6096000" cy="3429000"/>
           </a:xfrm>
           <a:custGeom>
@@ -1376,7 +1381,7 @@
         </p:nvSpPr>
         <p:spPr>
           <a:xfrm>
-            <a:off x="381300" y="685800"/>
+            <a:off x="381000" y="685800"/>
             <a:ext cx="6096000" cy="3429000"/>
           </a:xfrm>
           <a:custGeom>
@@ -1480,7 +1485,7 @@
         </p:nvSpPr>
         <p:spPr>
           <a:xfrm>
-            <a:off x="381300" y="685800"/>
+            <a:off x="381000" y="685800"/>
             <a:ext cx="6096000" cy="3429000"/>
           </a:xfrm>
           <a:custGeom>
@@ -8130,7 +8135,7 @@
 </file>
 
 <file path=ppt/slides/slide10.xml><?xml version="1.0" encoding="utf-8"?>
-<p:sld xmlns:a="http://schemas.openxmlformats.org/drawingml/2006/main" xmlns:r="http://schemas.openxmlformats.org/officeDocument/2006/relationships" xmlns:p="http://schemas.openxmlformats.org/presentationml/2006/main">
+<p:sld xmlns:a="http://schemas.openxmlformats.org/drawingml/2006/main" xmlns:r="http://schemas.openxmlformats.org/officeDocument/2006/relationships" xmlns:p="http://schemas.openxmlformats.org/presentationml/2006/main" show="0">
   <p:cSld>
     <p:spTree>
       <p:nvGrpSpPr>
@@ -8197,7 +8202,7 @@
 </file>
 
 <file path=ppt/slides/slide11.xml><?xml version="1.0" encoding="utf-8"?>
-<p:sld xmlns:a="http://schemas.openxmlformats.org/drawingml/2006/main" xmlns:r="http://schemas.openxmlformats.org/officeDocument/2006/relationships" xmlns:p="http://schemas.openxmlformats.org/presentationml/2006/main">
+<p:sld xmlns:a="http://schemas.openxmlformats.org/drawingml/2006/main" xmlns:r="http://schemas.openxmlformats.org/officeDocument/2006/relationships" xmlns:p="http://schemas.openxmlformats.org/presentationml/2006/main" show="0">
   <p:cSld>
     <p:spTree>
       <p:nvGrpSpPr>
@@ -8418,7 +8423,7 @@
 </file>
 
 <file path=ppt/slides/slide12.xml><?xml version="1.0" encoding="utf-8"?>
-<p:sld xmlns:a="http://schemas.openxmlformats.org/drawingml/2006/main" xmlns:r="http://schemas.openxmlformats.org/officeDocument/2006/relationships" xmlns:p="http://schemas.openxmlformats.org/presentationml/2006/main">
+<p:sld xmlns:a="http://schemas.openxmlformats.org/drawingml/2006/main" xmlns:r="http://schemas.openxmlformats.org/officeDocument/2006/relationships" xmlns:p="http://schemas.openxmlformats.org/presentationml/2006/main" show="0">
   <p:cSld>
     <p:spTree>
       <p:nvGrpSpPr>
@@ -9428,7 +9433,7 @@
 </file>
 
 <file path=ppt/slides/slide13.xml><?xml version="1.0" encoding="utf-8"?>
-<p:sld xmlns:a="http://schemas.openxmlformats.org/drawingml/2006/main" xmlns:r="http://schemas.openxmlformats.org/officeDocument/2006/relationships" xmlns:p="http://schemas.openxmlformats.org/presentationml/2006/main">
+<p:sld xmlns:a="http://schemas.openxmlformats.org/drawingml/2006/main" xmlns:r="http://schemas.openxmlformats.org/officeDocument/2006/relationships" xmlns:p="http://schemas.openxmlformats.org/presentationml/2006/main" show="0">
   <p:cSld>
     <p:spTree>
       <p:nvGrpSpPr>
@@ -9667,7 +9672,7 @@
 </file>
 
 <file path=ppt/slides/slide14.xml><?xml version="1.0" encoding="utf-8"?>
-<p:sld xmlns:a="http://schemas.openxmlformats.org/drawingml/2006/main" xmlns:r="http://schemas.openxmlformats.org/officeDocument/2006/relationships" xmlns:p="http://schemas.openxmlformats.org/presentationml/2006/main">
+<p:sld xmlns:a="http://schemas.openxmlformats.org/drawingml/2006/main" xmlns:r="http://schemas.openxmlformats.org/officeDocument/2006/relationships" xmlns:p="http://schemas.openxmlformats.org/presentationml/2006/main" show="0">
   <p:cSld>
     <p:spTree>
       <p:nvGrpSpPr>
@@ -10792,7 +10797,7 @@
 </file>
 
 <file path=ppt/slides/slide15.xml><?xml version="1.0" encoding="utf-8"?>
-<p:sld xmlns:a="http://schemas.openxmlformats.org/drawingml/2006/main" xmlns:r="http://schemas.openxmlformats.org/officeDocument/2006/relationships" xmlns:p="http://schemas.openxmlformats.org/presentationml/2006/main">
+<p:sld xmlns:a="http://schemas.openxmlformats.org/drawingml/2006/main" xmlns:r="http://schemas.openxmlformats.org/officeDocument/2006/relationships" xmlns:p="http://schemas.openxmlformats.org/presentationml/2006/main" show="0">
   <p:cSld>
     <p:spTree>
       <p:nvGrpSpPr>
@@ -11971,7 +11976,7 @@
 </file>
 
 <file path=ppt/slides/slide16.xml><?xml version="1.0" encoding="utf-8"?>
-<p:sld xmlns:a="http://schemas.openxmlformats.org/drawingml/2006/main" xmlns:r="http://schemas.openxmlformats.org/officeDocument/2006/relationships" xmlns:p="http://schemas.openxmlformats.org/presentationml/2006/main">
+<p:sld xmlns:a="http://schemas.openxmlformats.org/drawingml/2006/main" xmlns:r="http://schemas.openxmlformats.org/officeDocument/2006/relationships" xmlns:p="http://schemas.openxmlformats.org/presentationml/2006/main" show="0">
   <p:cSld>
     <p:spTree>
       <p:nvGrpSpPr>
